--- a/media/exports/reports/2026-06/growth-trades.pptx
+++ b/media/exports/reports/2026-06/growth-trades.pptx
@@ -237,67 +237,67 @@
                 <c:formatCode>$#,##0;[Red]($#,##0);"-"</c:formatCode>
                 <c:ptCount val="21"/>
                 <c:pt idx="0">
-                  <c:v>171009</c:v>
+                  <c:v>191014</c:v>
                 </c:pt>
                 <c:pt idx="1">
-                  <c:v>179474</c:v>
+                  <c:v>200124</c:v>
                 </c:pt>
                 <c:pt idx="2">
-                  <c:v>143156</c:v>
+                  <c:v>159406</c:v>
                 </c:pt>
                 <c:pt idx="3">
-                  <c:v>140909</c:v>
+                  <c:v>156794</c:v>
                 </c:pt>
                 <c:pt idx="4">
-                  <c:v>160943</c:v>
+                  <c:v>179190</c:v>
                 </c:pt>
                 <c:pt idx="5">
-                  <c:v>135082</c:v>
+                  <c:v>150465</c:v>
                 </c:pt>
                 <c:pt idx="6">
-                  <c:v>124705</c:v>
+                  <c:v>138865</c:v>
                 </c:pt>
                 <c:pt idx="7">
-                  <c:v>129816</c:v>
+                  <c:v>144649</c:v>
                 </c:pt>
                 <c:pt idx="8">
-                  <c:v>164113</c:v>
+                  <c:v>183265</c:v>
                 </c:pt>
                 <c:pt idx="9">
-                  <c:v>186760</c:v>
+                  <c:v>208588</c:v>
                 </c:pt>
                 <c:pt idx="10">
-                  <c:v>139164</c:v>
+                  <c:v>155118</c:v>
                 </c:pt>
                 <c:pt idx="11">
-                  <c:v>128255</c:v>
+                  <c:v>143077</c:v>
                 </c:pt>
                 <c:pt idx="12">
-                  <c:v>128898</c:v>
+                  <c:v>143566</c:v>
                 </c:pt>
                 <c:pt idx="13">
-                  <c:v>174786</c:v>
+                  <c:v>194966</c:v>
                 </c:pt>
                 <c:pt idx="14">
-                  <c:v>135079</c:v>
+                  <c:v>150283</c:v>
                 </c:pt>
                 <c:pt idx="15">
-                  <c:v>164780</c:v>
+                  <c:v>183306</c:v>
                 </c:pt>
                 <c:pt idx="16">
-                  <c:v>196372</c:v>
+                  <c:v>218908</c:v>
                 </c:pt>
                 <c:pt idx="17">
-                  <c:v>191500</c:v>
+                  <c:v>213578</c:v>
                 </c:pt>
                 <c:pt idx="18">
-                  <c:v>164987</c:v>
+                  <c:v>183967</c:v>
                 </c:pt>
                 <c:pt idx="19">
-                  <c:v>161963</c:v>
+                  <c:v>180342</c:v>
                 </c:pt>
                 <c:pt idx="20">
-                  <c:v>173163</c:v>
+                  <c:v>193032</c:v>
                 </c:pt>
               </c:numCache>
             </c:numRef>
@@ -531,67 +531,67 @@
                 <c:formatCode>$#,##0;[Red]($#,##0);"-"</c:formatCode>
                 <c:ptCount val="21"/>
                 <c:pt idx="0">
-                  <c:v>24670</c:v>
+                  <c:v>27650</c:v>
                 </c:pt>
                 <c:pt idx="1">
-                  <c:v>24670</c:v>
+                  <c:v>27650</c:v>
                 </c:pt>
                 <c:pt idx="2">
-                  <c:v>24670</c:v>
+                  <c:v>27650</c:v>
                 </c:pt>
                 <c:pt idx="3">
-                  <c:v>24670</c:v>
+                  <c:v>27650</c:v>
                 </c:pt>
                 <c:pt idx="4">
-                  <c:v>27930</c:v>
+                  <c:v>31300</c:v>
                 </c:pt>
                 <c:pt idx="5">
-                  <c:v>27930</c:v>
+                  <c:v>31300</c:v>
                 </c:pt>
                 <c:pt idx="6">
-                  <c:v>27930</c:v>
+                  <c:v>31300</c:v>
                 </c:pt>
                 <c:pt idx="7">
-                  <c:v>27930</c:v>
+                  <c:v>31300</c:v>
                 </c:pt>
                 <c:pt idx="8">
-                  <c:v>31870</c:v>
+                  <c:v>35720</c:v>
                 </c:pt>
                 <c:pt idx="9">
-                  <c:v>33200</c:v>
+                  <c:v>37200</c:v>
                 </c:pt>
                 <c:pt idx="10">
-                  <c:v>33200</c:v>
+                  <c:v>37200</c:v>
                 </c:pt>
                 <c:pt idx="11">
-                  <c:v>33200</c:v>
+                  <c:v>37200</c:v>
                 </c:pt>
                 <c:pt idx="12">
-                  <c:v>35800</c:v>
+                  <c:v>40100</c:v>
                 </c:pt>
                 <c:pt idx="13">
-                  <c:v>35800</c:v>
+                  <c:v>40100</c:v>
                 </c:pt>
                 <c:pt idx="14">
-                  <c:v>35800</c:v>
+                  <c:v>40100</c:v>
                 </c:pt>
                 <c:pt idx="15">
-                  <c:v>35800</c:v>
+                  <c:v>40100</c:v>
                 </c:pt>
                 <c:pt idx="16">
-                  <c:v>37500</c:v>
+                  <c:v>42000</c:v>
                 </c:pt>
                 <c:pt idx="17">
-                  <c:v>37500</c:v>
+                  <c:v>42000</c:v>
                 </c:pt>
                 <c:pt idx="18">
-                  <c:v>37500</c:v>
+                  <c:v>42000</c:v>
                 </c:pt>
                 <c:pt idx="19">
-                  <c:v>40500</c:v>
+                  <c:v>45350</c:v>
                 </c:pt>
                 <c:pt idx="20">
-                  <c:v>40500</c:v>
+                  <c:v>45350</c:v>
                 </c:pt>
               </c:numCache>
             </c:numRef>
@@ -825,67 +825,67 @@
                 <c:formatCode>$#,##0;[Red]($#,##0);"-"</c:formatCode>
                 <c:ptCount val="21"/>
                 <c:pt idx="0">
+                  <c:v>141600</c:v>
+                </c:pt>
+                <c:pt idx="1">
+                  <c:v>147100</c:v>
+                </c:pt>
+                <c:pt idx="2">
+                  <c:v>103700</c:v>
+                </c:pt>
+                <c:pt idx="3">
+                  <c:v>100100</c:v>
+                </c:pt>
+                <c:pt idx="4">
+                  <c:v>118600</c:v>
+                </c:pt>
+                <c:pt idx="5">
+                  <c:v>96400</c:v>
+                </c:pt>
+                <c:pt idx="6">
+                  <c:v>83900</c:v>
+                </c:pt>
+                <c:pt idx="7">
+                  <c:v>89900</c:v>
+                </c:pt>
+                <c:pt idx="8">
                   <c:v>126300</c:v>
                 </c:pt>
-                <c:pt idx="1">
-                  <c:v>131400</c:v>
-                </c:pt>
-                <c:pt idx="2">
-                  <c:v>92600</c:v>
-                </c:pt>
-                <c:pt idx="3">
-                  <c:v>89400</c:v>
-                </c:pt>
-                <c:pt idx="4">
-                  <c:v>106000</c:v>
-                </c:pt>
-                <c:pt idx="5">
-                  <c:v>86100</c:v>
-                </c:pt>
-                <c:pt idx="6">
-                  <c:v>74900</c:v>
-                </c:pt>
-                <c:pt idx="7">
-                  <c:v>80300</c:v>
-                </c:pt>
-                <c:pt idx="8">
-                  <c:v>112700</c:v>
-                </c:pt>
                 <c:pt idx="9">
-                  <c:v>135800</c:v>
+                  <c:v>152100</c:v>
                 </c:pt>
                 <c:pt idx="10">
-                  <c:v>86200</c:v>
+                  <c:v>96500</c:v>
                 </c:pt>
                 <c:pt idx="11">
-                  <c:v>75100</c:v>
+                  <c:v>84200</c:v>
                 </c:pt>
                 <c:pt idx="12">
-                  <c:v>70800</c:v>
+                  <c:v>79300</c:v>
                 </c:pt>
                 <c:pt idx="13">
-                  <c:v>113300</c:v>
+                  <c:v>126900</c:v>
                 </c:pt>
                 <c:pt idx="14">
-                  <c:v>69700</c:v>
+                  <c:v>78100</c:v>
                 </c:pt>
                 <c:pt idx="15">
-                  <c:v>97500</c:v>
+                  <c:v>109100</c:v>
                 </c:pt>
                 <c:pt idx="16">
-                  <c:v>129300</c:v>
+                  <c:v>144800</c:v>
                 </c:pt>
                 <c:pt idx="17">
-                  <c:v>129400</c:v>
+                  <c:v>144900</c:v>
                 </c:pt>
                 <c:pt idx="18">
-                  <c:v>104400</c:v>
+                  <c:v>116900</c:v>
                 </c:pt>
                 <c:pt idx="19">
-                  <c:v>92400</c:v>
+                  <c:v>103400</c:v>
                 </c:pt>
                 <c:pt idx="20">
-                  <c:v>103200</c:v>
+                  <c:v>115600</c:v>
                 </c:pt>
               </c:numCache>
             </c:numRef>
@@ -934,7 +934,7 @@
         <c:axId val="-2100718248"/>
         <c:scaling>
           <c:orientation val="minMax"/>
-          <c:max val="150000.0"/>
+          <c:max val="200000.0"/>
           <c:min val="0.0"/>
         </c:scaling>
         <c:delete val="0"/>
@@ -1119,67 +1119,67 @@
                 <c:formatCode>$#,##0;[Red]($#,##0);"-"</c:formatCode>
                 <c:ptCount val="21"/>
                 <c:pt idx="0">
-                  <c:v>20039</c:v>
+                  <c:v>21764</c:v>
                 </c:pt>
                 <c:pt idx="1">
-                  <c:v>23404</c:v>
+                  <c:v>25374</c:v>
                 </c:pt>
                 <c:pt idx="2">
-                  <c:v>25886</c:v>
+                  <c:v>28056</c:v>
                 </c:pt>
                 <c:pt idx="3">
-                  <c:v>26839</c:v>
+                  <c:v>29044</c:v>
                 </c:pt>
                 <c:pt idx="4">
-                  <c:v>27013</c:v>
+                  <c:v>29290</c:v>
                 </c:pt>
                 <c:pt idx="5">
-                  <c:v>21052</c:v>
+                  <c:v>22765</c:v>
                 </c:pt>
                 <c:pt idx="6">
-                  <c:v>21875</c:v>
+                  <c:v>23665</c:v>
                 </c:pt>
                 <c:pt idx="7">
-                  <c:v>21586</c:v>
+                  <c:v>23449</c:v>
                 </c:pt>
                 <c:pt idx="8">
-                  <c:v>19543</c:v>
+                  <c:v>21245</c:v>
                 </c:pt>
                 <c:pt idx="9">
-                  <c:v>17760</c:v>
+                  <c:v>19288</c:v>
                 </c:pt>
                 <c:pt idx="10">
-                  <c:v>19764</c:v>
+                  <c:v>21418</c:v>
                 </c:pt>
                 <c:pt idx="11">
-                  <c:v>19955</c:v>
+                  <c:v>21677</c:v>
                 </c:pt>
                 <c:pt idx="12">
-                  <c:v>22298</c:v>
+                  <c:v>24166</c:v>
                 </c:pt>
                 <c:pt idx="13">
-                  <c:v>25686</c:v>
+                  <c:v>27966</c:v>
                 </c:pt>
                 <c:pt idx="14">
-                  <c:v>29579</c:v>
+                  <c:v>32083</c:v>
                 </c:pt>
                 <c:pt idx="15">
-                  <c:v>31480</c:v>
+                  <c:v>34106</c:v>
                 </c:pt>
                 <c:pt idx="16">
-                  <c:v>29572</c:v>
+                  <c:v>32108</c:v>
                 </c:pt>
                 <c:pt idx="17">
-                  <c:v>24600</c:v>
+                  <c:v>26678</c:v>
                 </c:pt>
                 <c:pt idx="18">
-                  <c:v>23087</c:v>
+                  <c:v>25067</c:v>
                 </c:pt>
                 <c:pt idx="19">
-                  <c:v>29063</c:v>
+                  <c:v>31592</c:v>
                 </c:pt>
                 <c:pt idx="20">
-                  <c:v>29463</c:v>
+                  <c:v>32082</c:v>
                 </c:pt>
               </c:numCache>
             </c:numRef>
@@ -1753,7 +1753,7 @@
           <a:lstStyle/>
           <a:p>
             <a:r>
-              <a:t>Trades · All. June against June last year: 5.5%; Year to date (Jul to Jun 2026): $1,945,707; Gross margin, year to date: 37.8%. Revenue is $1,945,707 this financial year to date (Jul to Jun 2026). Maintenance contracts make the highest gross margin (59.5%); Installations the lowest (28.4%). The business needs 35.6% gross margin just to cover overheads. Installations: 28.4% gross margin, 6.6 points under the 35.0% target: about $79,655 on $1,207,100 of revenue this financial year to date. It's below the 35.6% needed to cover overheads, too. Maintenance contracts: 59.5% gross margin, 24.5 points over the 35.0% target ($106,951 ahead on $436,300 this financial year to date).</a:t>
+              <a:t>Trades · All. June against June last year: 5.3%; Year to date (Jul to Jun 2026): $2,168,731; Gross margin, year to date: 44.2%. Revenue is $2,168,731 this financial year to date (Jul to Jun 2026). Maintenance contracts make the highest gross margin (63.9%); Installations the lowest (36.1%). The business needs 44.9% gross margin just to cover overheads. Installations: 36.1% gross margin, 1.1 points over the 35.0% target ($14,400 ahead on $1,351,800 this financial year to date). Maintenance contracts: 63.9% gross margin, 28.9 points over the 35.0% target ($141,011 ahead on $488,700 this financial year to date).</a:t>
             </a:r>
           </a:p>
         </p:txBody>
@@ -1823,7 +1823,7 @@
           <a:lstStyle/>
           <a:p>
             <a:r>
-              <a:t>Trades · Maintenance contracts. June against June last year: 27.1%; Year to date (Jul to Jun 2026): $436,300; Gross margin, year to date: 59.5%. Maintenance contracts brought in $436,300 this financial year to date, at a 59.5% gross margin (above the 37.8% overall). Maintenance contracts: 59.5% gross margin, 24.5 points over the 35.0% target ($106,951 ahead on $436,300 this financial year to date).</a:t>
+              <a:t>Trades · Maintenance contracts. June against June last year: 27.0%; Year to date (Jul to Jun 2026): $488,700; Gross margin, year to date: 63.9%. Maintenance contracts brought in $488,700 this financial year to date, at a 63.9% gross margin (above the 44.2% overall). Maintenance contracts: 63.9% gross margin, 28.9 points over the 35.0% target ($141,011 ahead on $488,700 this financial year to date).</a:t>
             </a:r>
           </a:p>
         </p:txBody>
@@ -1893,7 +1893,7 @@
           <a:lstStyle/>
           <a:p>
             <a:r>
-              <a:t>Trades · Installations. June against June last year: (8.4%); Year to date (Jul to Jun 2026): $1,207,100; Gross margin, year to date: 28.4%. Installations brought in $1,207,100 this financial year to date, at a 28.4% gross margin (below the 37.8% overall). Installations: 28.4% gross margin, 6.6 points under the 35.0% target: about $79,655 on $1,207,100 of revenue this financial year to date. It's below the 35.6% needed to cover overheads, too.</a:t>
+              <a:t>Trades · Installations. June against June last year: (8.5%); Year to date (Jul to Jun 2026): $1,351,800; Gross margin, year to date: 36.1%. Installations brought in $1,351,800 this financial year to date, at a 36.1% gross margin (below the 44.2% overall). Installations: 36.1% gross margin, 1.1 points over the 35.0% target ($14,400 ahead on $1,351,800 this financial year to date).</a:t>
             </a:r>
           </a:p>
         </p:txBody>
@@ -1963,7 +1963,7 @@
           <a:lstStyle/>
           <a:p>
             <a:r>
-              <a:t>Trades · Call-outs and repairs. June against June last year: 50.8%; Year to date (Jul to Jun 2026): $302,307; Gross margin, year to date: 43.8%. Call-outs and repairs brought in $302,307 this financial year to date, at a 43.8% gross margin (above the 37.8% overall). Call-outs and repairs: 43.8% gross margin, 8.8 points over the 35.0% target ($26,660 ahead on $302,307 this financial year to date).</a:t>
+              <a:t>Trades · Call-outs and repairs. June against June last year: 51.0%; Year to date (Jul to Jun 2026): $328,231; Gross margin, year to date: 48.3%. Call-outs and repairs brought in $328,231 this financial year to date, at a 48.3% gross margin (above the 44.2% overall). Call-outs and repairs: 48.3% gross margin, 13.3 points over the 35.0% target ($43,510 ahead on $328,231 this financial year to date).</a:t>
             </a:r>
           </a:p>
         </p:txBody>
@@ -2033,7 +2033,7 @@
           <a:lstStyle/>
           <a:p>
             <a:r>
-              <a:t>By line: financial year to date (Jul to Jun 2026) against the same period last year · Trades. Same period last year: Not available: the data starts October 2024. From gross margin to profit: June's jobs made $66,663 gross margin (38.5%). Technician time not charged to jobs took $2,410 and overheads $59,260, leaving $4,993 profit before tax (2.9% of revenue). To cover overheads, jobs need a 35.6% gross margin on average.</a:t>
+              <a:t>By line: financial year to date (Jul to Jun 2026) against the same period last year · Trades. Same period last year: Not available: the data starts October 2024. From gross margin to profit: June's jobs made $86,532 gross margin (44.8%). Technician time not charged to jobs took $27,397 and overheads $59,260, leaving ($125) profit before tax ((0.1%) of revenue). To cover overheads, jobs need a 44.9% gross margin on average.</a:t>
             </a:r>
           </a:p>
         </p:txBody>
@@ -5448,7 +5448,7 @@
                 </a:solidFill>
                 <a:latin typeface="Roboto"/>
               </a:rPr>
-              <a:t>Data retrieved 2pm, Tue 6 Oct 2026 · Generated 8 Oct 2026, 9:35am · Sample data · Made with Python (python-pptx)</a:t>
+              <a:t>Data retrieved 2pm, Tue 6 Oct 2026 · Generated 9 Oct 2026, 8:41am · Sample data · Made with Python (python-pptx)</a:t>
             </a:r>
           </a:p>
         </p:txBody>
@@ -5794,7 +5794,7 @@
                 </a:solidFill>
                 <a:latin typeface="Roboto"/>
               </a:rPr>
-              <a:t>5.5%</a:t>
+              <a:t>5.3%</a:t>
             </a:r>
           </a:p>
         </p:txBody>
@@ -5833,7 +5833,7 @@
                 </a:solidFill>
                 <a:latin typeface="Roboto"/>
               </a:rPr>
-              <a:t>$173,163 against $164,113</a:t>
+              <a:t>$193,032 against $183,265</a:t>
             </a:r>
           </a:p>
         </p:txBody>
@@ -5960,7 +5960,7 @@
                 </a:solidFill>
                 <a:latin typeface="Roboto"/>
               </a:rPr>
-              <a:t>$1,945,707</a:t>
+              <a:t>$2,168,731</a:t>
             </a:r>
           </a:p>
         </p:txBody>
@@ -6126,7 +6126,7 @@
                 </a:solidFill>
                 <a:latin typeface="Roboto"/>
               </a:rPr>
-              <a:t>37.8%</a:t>
+              <a:t>44.2%</a:t>
             </a:r>
           </a:p>
         </p:txBody>
@@ -6165,7 +6165,7 @@
                 </a:solidFill>
                 <a:latin typeface="Roboto"/>
               </a:rPr>
-              <a:t>$734,953 before overheads</a:t>
+              <a:t>$957,977 before overheads</a:t>
             </a:r>
           </a:p>
         </p:txBody>
@@ -6180,7 +6180,7 @@
         </p:nvGraphicFramePr>
         <p:xfrm>
           <a:off x="457200" y="2604516"/>
-          <a:ext cx="11277295" cy="2119884"/>
+          <a:ext cx="11277295" cy="2318004"/>
         </p:xfrm>
         <a:graphic>
           <a:graphicData uri="http://schemas.openxmlformats.org/drawingml/2006/chart">
@@ -6196,8 +6196,8 @@
         </p:nvSpPr>
         <p:spPr>
           <a:xfrm>
-            <a:off x="457200" y="4815840"/>
-            <a:ext cx="5501487" cy="1493520"/>
+            <a:off x="457200" y="5013960"/>
+            <a:ext cx="5501487" cy="1295400"/>
           </a:xfrm>
           <a:prstGeom prst="rect">
             <a:avLst/>
@@ -6245,7 +6245,7 @@
         </p:nvSpPr>
         <p:spPr>
           <a:xfrm>
-            <a:off x="594360" y="4870704"/>
+            <a:off x="594360" y="5068824"/>
             <a:ext cx="5227167" cy="274320"/>
           </a:xfrm>
           <a:prstGeom prst="rect">
@@ -6284,8 +6284,8 @@
         </p:nvSpPr>
         <p:spPr>
           <a:xfrm>
-            <a:off x="594360" y="5145024"/>
-            <a:ext cx="5227167" cy="1127760"/>
+            <a:off x="594360" y="5343144"/>
+            <a:ext cx="5227167" cy="929640"/>
           </a:xfrm>
           <a:prstGeom prst="rect">
             <a:avLst/>
@@ -6310,7 +6310,7 @@
                 </a:solidFill>
                 <a:latin typeface="Roboto"/>
               </a:rPr>
-              <a:t>Revenue is $1,945,707 this financial year to date (Jul to Jun 2026). Maintenance contracts make the highest gross margin (59.5%); Installations the lowest (28.4%). The business needs 35.6% gross margin just to cover overheads.</a:t>
+              <a:t>Revenue is $2,168,731 this financial year to date (Jul to Jun 2026). Maintenance contracts make the highest gross margin (63.9%); Installations the lowest (36.1%). The business needs 44.9% gross margin just to cover overheads.</a:t>
             </a:r>
           </a:p>
         </p:txBody>
@@ -6323,8 +6323,8 @@
         </p:nvSpPr>
         <p:spPr>
           <a:xfrm>
-            <a:off x="6233007" y="4815840"/>
-            <a:ext cx="5501487" cy="1493520"/>
+            <a:off x="6233007" y="5013960"/>
+            <a:ext cx="5501487" cy="1295400"/>
           </a:xfrm>
           <a:prstGeom prst="rect">
             <a:avLst/>
@@ -6372,7 +6372,7 @@
         </p:nvSpPr>
         <p:spPr>
           <a:xfrm>
-            <a:off x="6370167" y="4870704"/>
+            <a:off x="6370167" y="5068824"/>
             <a:ext cx="5227167" cy="274320"/>
           </a:xfrm>
           <a:prstGeom prst="rect">
@@ -6411,8 +6411,8 @@
         </p:nvSpPr>
         <p:spPr>
           <a:xfrm>
-            <a:off x="6370167" y="5145024"/>
-            <a:ext cx="5227167" cy="1127760"/>
+            <a:off x="6370167" y="5343144"/>
+            <a:ext cx="5227167" cy="929640"/>
           </a:xfrm>
           <a:prstGeom prst="rect">
             <a:avLst/>
@@ -6437,7 +6437,7 @@
                 </a:solidFill>
                 <a:latin typeface="Roboto"/>
               </a:rPr>
-              <a:t>Installations: 28.4% gross margin, 6.6 points under the 35.0% target: about $79,655 on $1,207,100 of revenue this financial year to date. It's below the 35.6% needed to cover overheads, too. Maintenance contracts: 59.5% gross margin, 24.5 points over the 35.0% target ($106,951 ahead on $436,300 this financial year to date).</a:t>
+              <a:t>Installations: 36.1% gross margin, 1.1 points over the 35.0% target ($14,400 ahead on $1,351,800 this financial year to date). Maintenance contracts: 63.9% gross margin, 28.9 points over the 35.0% target ($141,011 ahead on $488,700 this financial year to date).</a:t>
             </a:r>
           </a:p>
         </p:txBody>
@@ -6515,7 +6515,7 @@
                 </a:solidFill>
                 <a:latin typeface="Roboto"/>
               </a:rPr>
-              <a:t>Data retrieved 2pm, Tue 6 Oct 2026 · Generated 8 Oct 2026, 9:35am · Sample data · Made with Python (python-pptx)</a:t>
+              <a:t>Data retrieved 2pm, Tue 6 Oct 2026 · Generated 9 Oct 2026, 8:41am · Sample data · Made with Python (python-pptx)</a:t>
             </a:r>
           </a:p>
         </p:txBody>
@@ -6861,7 +6861,7 @@
                 </a:solidFill>
                 <a:latin typeface="Roboto"/>
               </a:rPr>
-              <a:t>27.1%</a:t>
+              <a:t>27.0%</a:t>
             </a:r>
           </a:p>
         </p:txBody>
@@ -6900,7 +6900,7 @@
                 </a:solidFill>
                 <a:latin typeface="Roboto"/>
               </a:rPr>
-              <a:t>$40,500 against $31,870</a:t>
+              <a:t>$45,350 against $35,720</a:t>
             </a:r>
           </a:p>
         </p:txBody>
@@ -7027,7 +7027,7 @@
                 </a:solidFill>
                 <a:latin typeface="Roboto"/>
               </a:rPr>
-              <a:t>$436,300</a:t>
+              <a:t>$488,700</a:t>
             </a:r>
           </a:p>
         </p:txBody>
@@ -7193,7 +7193,7 @@
                 </a:solidFill>
                 <a:latin typeface="Roboto"/>
               </a:rPr>
-              <a:t>59.5%</a:t>
+              <a:t>63.9%</a:t>
             </a:r>
           </a:p>
         </p:txBody>
@@ -7232,7 +7232,7 @@
                 </a:solidFill>
                 <a:latin typeface="Roboto"/>
               </a:rPr>
-              <a:t>$259,656 before overheads</a:t>
+              <a:t>$312,056 before overheads</a:t>
             </a:r>
           </a:p>
         </p:txBody>
@@ -7377,7 +7377,7 @@
                 </a:solidFill>
                 <a:latin typeface="Roboto"/>
               </a:rPr>
-              <a:t>Maintenance contracts brought in $436,300 this financial year to date, at a 59.5% gross margin (above the 37.8% overall).</a:t>
+              <a:t>Maintenance contracts brought in $488,700 this financial year to date, at a 63.9% gross margin (above the 44.2% overall).</a:t>
             </a:r>
           </a:p>
         </p:txBody>
@@ -7504,7 +7504,7 @@
                 </a:solidFill>
                 <a:latin typeface="Roboto"/>
               </a:rPr>
-              <a:t>Maintenance contracts: 59.5% gross margin, 24.5 points over the 35.0% target ($106,951 ahead on $436,300 this financial year to date).</a:t>
+              <a:t>Maintenance contracts: 63.9% gross margin, 28.9 points over the 35.0% target ($141,011 ahead on $488,700 this financial year to date).</a:t>
             </a:r>
           </a:p>
         </p:txBody>
@@ -7582,7 +7582,7 @@
                 </a:solidFill>
                 <a:latin typeface="Roboto"/>
               </a:rPr>
-              <a:t>Data retrieved 2pm, Tue 6 Oct 2026 · Generated 8 Oct 2026, 9:35am · Sample data · Made with Python (python-pptx)</a:t>
+              <a:t>Data retrieved 2pm, Tue 6 Oct 2026 · Generated 9 Oct 2026, 8:41am · Sample data · Made with Python (python-pptx)</a:t>
             </a:r>
           </a:p>
         </p:txBody>
@@ -7928,7 +7928,7 @@
                 </a:solidFill>
                 <a:latin typeface="Roboto"/>
               </a:rPr>
-              <a:t>(8.4%)</a:t>
+              <a:t>(8.5%)</a:t>
             </a:r>
           </a:p>
         </p:txBody>
@@ -7967,7 +7967,7 @@
                 </a:solidFill>
                 <a:latin typeface="Roboto"/>
               </a:rPr>
-              <a:t>$103,200 against $112,700</a:t>
+              <a:t>$115,600 against $126,300</a:t>
             </a:r>
           </a:p>
         </p:txBody>
@@ -8094,7 +8094,7 @@
                 </a:solidFill>
                 <a:latin typeface="Roboto"/>
               </a:rPr>
-              <a:t>$1,207,100</a:t>
+              <a:t>$1,351,800</a:t>
             </a:r>
           </a:p>
         </p:txBody>
@@ -8260,7 +8260,7 @@
                 </a:solidFill>
                 <a:latin typeface="Roboto"/>
               </a:rPr>
-              <a:t>28.4%</a:t>
+              <a:t>36.1%</a:t>
             </a:r>
           </a:p>
         </p:txBody>
@@ -8299,7 +8299,7 @@
                 </a:solidFill>
                 <a:latin typeface="Roboto"/>
               </a:rPr>
-              <a:t>$342,830 before overheads</a:t>
+              <a:t>$487,530 before overheads</a:t>
             </a:r>
           </a:p>
         </p:txBody>
@@ -8314,7 +8314,7 @@
         </p:nvGraphicFramePr>
         <p:xfrm>
           <a:off x="457200" y="2604516"/>
-          <a:ext cx="11277295" cy="2516124"/>
+          <a:ext cx="11277295" cy="2714244"/>
         </p:xfrm>
         <a:graphic>
           <a:graphicData uri="http://schemas.openxmlformats.org/drawingml/2006/chart">
@@ -8330,8 +8330,8 @@
         </p:nvSpPr>
         <p:spPr>
           <a:xfrm>
-            <a:off x="457200" y="5212080"/>
-            <a:ext cx="5501487" cy="1097280"/>
+            <a:off x="457200" y="5410200"/>
+            <a:ext cx="5501487" cy="899160"/>
           </a:xfrm>
           <a:prstGeom prst="rect">
             <a:avLst/>
@@ -8379,7 +8379,7 @@
         </p:nvSpPr>
         <p:spPr>
           <a:xfrm>
-            <a:off x="594360" y="5266944"/>
+            <a:off x="594360" y="5465064"/>
             <a:ext cx="5227167" cy="274320"/>
           </a:xfrm>
           <a:prstGeom prst="rect">
@@ -8418,8 +8418,8 @@
         </p:nvSpPr>
         <p:spPr>
           <a:xfrm>
-            <a:off x="594360" y="5541264"/>
-            <a:ext cx="5227167" cy="731520"/>
+            <a:off x="594360" y="5739384"/>
+            <a:ext cx="5227167" cy="533400"/>
           </a:xfrm>
           <a:prstGeom prst="rect">
             <a:avLst/>
@@ -8444,7 +8444,7 @@
                 </a:solidFill>
                 <a:latin typeface="Roboto"/>
               </a:rPr>
-              <a:t>Installations brought in $1,207,100 this financial year to date, at a 28.4% gross margin (below the 37.8% overall).</a:t>
+              <a:t>Installations brought in $1,351,800 this financial year to date, at a 36.1% gross margin (below the 44.2% overall).</a:t>
             </a:r>
           </a:p>
         </p:txBody>
@@ -8457,8 +8457,8 @@
         </p:nvSpPr>
         <p:spPr>
           <a:xfrm>
-            <a:off x="6233007" y="5212080"/>
-            <a:ext cx="5501487" cy="1097280"/>
+            <a:off x="6233007" y="5410200"/>
+            <a:ext cx="5501487" cy="899160"/>
           </a:xfrm>
           <a:prstGeom prst="rect">
             <a:avLst/>
@@ -8506,7 +8506,7 @@
         </p:nvSpPr>
         <p:spPr>
           <a:xfrm>
-            <a:off x="6370167" y="5266944"/>
+            <a:off x="6370167" y="5465064"/>
             <a:ext cx="5227167" cy="274320"/>
           </a:xfrm>
           <a:prstGeom prst="rect">
@@ -8545,8 +8545,8 @@
         </p:nvSpPr>
         <p:spPr>
           <a:xfrm>
-            <a:off x="6370167" y="5541264"/>
-            <a:ext cx="5227167" cy="731520"/>
+            <a:off x="6370167" y="5739384"/>
+            <a:ext cx="5227167" cy="533400"/>
           </a:xfrm>
           <a:prstGeom prst="rect">
             <a:avLst/>
@@ -8571,7 +8571,7 @@
                 </a:solidFill>
                 <a:latin typeface="Roboto"/>
               </a:rPr>
-              <a:t>Installations: 28.4% gross margin, 6.6 points under the 35.0% target: about $79,655 on $1,207,100 of revenue this financial year to date. It's below the 35.6% needed to cover overheads, too.</a:t>
+              <a:t>Installations: 36.1% gross margin, 1.1 points over the 35.0% target ($14,400 ahead on $1,351,800 this financial year to date).</a:t>
             </a:r>
           </a:p>
         </p:txBody>
@@ -8649,7 +8649,7 @@
                 </a:solidFill>
                 <a:latin typeface="Roboto"/>
               </a:rPr>
-              <a:t>Data retrieved 2pm, Tue 6 Oct 2026 · Generated 8 Oct 2026, 9:35am · Sample data · Made with Python (python-pptx)</a:t>
+              <a:t>Data retrieved 2pm, Tue 6 Oct 2026 · Generated 9 Oct 2026, 8:41am · Sample data · Made with Python (python-pptx)</a:t>
             </a:r>
           </a:p>
         </p:txBody>
@@ -8995,7 +8995,7 @@
                 </a:solidFill>
                 <a:latin typeface="Roboto"/>
               </a:rPr>
-              <a:t>50.8%</a:t>
+              <a:t>51.0%</a:t>
             </a:r>
           </a:p>
         </p:txBody>
@@ -9034,7 +9034,7 @@
                 </a:solidFill>
                 <a:latin typeface="Roboto"/>
               </a:rPr>
-              <a:t>$29,463 against $19,543</a:t>
+              <a:t>$32,082 against $21,245</a:t>
             </a:r>
           </a:p>
         </p:txBody>
@@ -9161,7 +9161,7 @@
                 </a:solidFill>
                 <a:latin typeface="Roboto"/>
               </a:rPr>
-              <a:t>$302,307</a:t>
+              <a:t>$328,231</a:t>
             </a:r>
           </a:p>
         </p:txBody>
@@ -9327,7 +9327,7 @@
                 </a:solidFill>
                 <a:latin typeface="Roboto"/>
               </a:rPr>
-              <a:t>43.8%</a:t>
+              <a:t>48.3%</a:t>
             </a:r>
           </a:p>
         </p:txBody>
@@ -9366,7 +9366,7 @@
                 </a:solidFill>
                 <a:latin typeface="Roboto"/>
               </a:rPr>
-              <a:t>$132,467 before overheads</a:t>
+              <a:t>$158,391 before overheads</a:t>
             </a:r>
           </a:p>
         </p:txBody>
@@ -9511,7 +9511,7 @@
                 </a:solidFill>
                 <a:latin typeface="Roboto"/>
               </a:rPr>
-              <a:t>Call-outs and repairs brought in $302,307 this financial year to date, at a 43.8% gross margin (above the 37.8% overall).</a:t>
+              <a:t>Call-outs and repairs brought in $328,231 this financial year to date, at a 48.3% gross margin (above the 44.2% overall).</a:t>
             </a:r>
           </a:p>
         </p:txBody>
@@ -9638,7 +9638,7 @@
                 </a:solidFill>
                 <a:latin typeface="Roboto"/>
               </a:rPr>
-              <a:t>Call-outs and repairs: 43.8% gross margin, 8.8 points over the 35.0% target ($26,660 ahead on $302,307 this financial year to date).</a:t>
+              <a:t>Call-outs and repairs: 48.3% gross margin, 13.3 points over the 35.0% target ($43,510 ahead on $328,231 this financial year to date).</a:t>
             </a:r>
           </a:p>
         </p:txBody>
@@ -9716,7 +9716,7 @@
                 </a:solidFill>
                 <a:latin typeface="Roboto"/>
               </a:rPr>
-              <a:t>Data retrieved 2pm, Tue 6 Oct 2026 · Generated 8 Oct 2026, 9:35am · Sample data · Made with Python (python-pptx)</a:t>
+              <a:t>Data retrieved 2pm, Tue 6 Oct 2026 · Generated 9 Oct 2026, 8:41am · Sample data · Made with Python (python-pptx)</a:t>
             </a:r>
           </a:p>
         </p:txBody>
@@ -9935,7 +9935,7 @@
                 </a:solidFill>
                 <a:latin typeface="Roboto"/>
               </a:rPr>
-              <a:t>Same period last year: Not available: the data starts October 2024. From gross margin to profit: June's jobs made $66,663 gross margin (38.5%). Technician time not charged to jobs took $2,410 and overheads $59,260, leaving $4,993 profit before tax (2.9% of revenue). To cover overheads, jobs need a 35.6% gross margin on average.</a:t>
+              <a:t>Same period last year: Not available: the data starts October 2024. From gross margin to profit: June's jobs made $86,532 gross margin (44.8%). Technician time not charged to jobs took $27,397 and overheads $59,260, leaving ($125) profit before tax ((0.1%) of revenue). To cover overheads, jobs need a 44.9% gross margin on average.</a:t>
             </a:r>
           </a:p>
         </p:txBody>
@@ -10166,7 +10166,7 @@
                           </a:solidFill>
                           <a:latin typeface="Roboto"/>
                         </a:rPr>
-                        <a:t>$436,300</a:t>
+                        <a:t>$488,700</a:t>
                       </a:r>
                     </a:p>
                   </a:txBody>
@@ -10247,7 +10247,7 @@
                           </a:solidFill>
                           <a:latin typeface="Roboto"/>
                         </a:rPr>
-                        <a:t>$259,656</a:t>
+                        <a:t>$312,056</a:t>
                       </a:r>
                     </a:p>
                   </a:txBody>
@@ -10274,7 +10274,7 @@
                           </a:solidFill>
                           <a:latin typeface="Roboto"/>
                         </a:rPr>
-                        <a:t>59.5%</a:t>
+                        <a:t>63.9%</a:t>
                       </a:r>
                     </a:p>
                   </a:txBody>
@@ -10330,7 +10330,7 @@
                           </a:solidFill>
                           <a:latin typeface="Roboto"/>
                         </a:rPr>
-                        <a:t>$1,207,100</a:t>
+                        <a:t>$1,351,800</a:t>
                       </a:r>
                     </a:p>
                   </a:txBody>
@@ -10411,7 +10411,7 @@
                           </a:solidFill>
                           <a:latin typeface="Roboto"/>
                         </a:rPr>
-                        <a:t>$342,830</a:t>
+                        <a:t>$487,530</a:t>
                       </a:r>
                     </a:p>
                   </a:txBody>
@@ -10438,7 +10438,7 @@
                           </a:solidFill>
                           <a:latin typeface="Roboto"/>
                         </a:rPr>
-                        <a:t>28.4%</a:t>
+                        <a:t>36.1%</a:t>
                       </a:r>
                     </a:p>
                   </a:txBody>
@@ -10494,7 +10494,7 @@
                           </a:solidFill>
                           <a:latin typeface="Roboto"/>
                         </a:rPr>
-                        <a:t>$302,307</a:t>
+                        <a:t>$328,231</a:t>
                       </a:r>
                     </a:p>
                   </a:txBody>
@@ -10575,7 +10575,7 @@
                           </a:solidFill>
                           <a:latin typeface="Roboto"/>
                         </a:rPr>
-                        <a:t>$132,467</a:t>
+                        <a:t>$158,391</a:t>
                       </a:r>
                     </a:p>
                   </a:txBody>
@@ -10602,7 +10602,7 @@
                           </a:solidFill>
                           <a:latin typeface="Roboto"/>
                         </a:rPr>
-                        <a:t>43.8%</a:t>
+                        <a:t>48.3%</a:t>
                       </a:r>
                     </a:p>
                   </a:txBody>
@@ -10658,7 +10658,7 @@
                           </a:solidFill>
                           <a:latin typeface="Roboto"/>
                         </a:rPr>
-                        <a:t>$1,945,707</a:t>
+                        <a:t>$2,168,731</a:t>
                       </a:r>
                     </a:p>
                   </a:txBody>
@@ -10739,7 +10739,7 @@
                           </a:solidFill>
                           <a:latin typeface="Roboto"/>
                         </a:rPr>
-                        <a:t>$734,953</a:t>
+                        <a:t>$957,977</a:t>
                       </a:r>
                     </a:p>
                   </a:txBody>
@@ -10766,7 +10766,7 @@
                           </a:solidFill>
                           <a:latin typeface="Roboto"/>
                         </a:rPr>
-                        <a:t>37.8%</a:t>
+                        <a:t>44.2%</a:t>
                       </a:r>
                     </a:p>
                   </a:txBody>
@@ -10854,7 +10854,7 @@
                 </a:solidFill>
                 <a:latin typeface="Roboto"/>
               </a:rPr>
-              <a:t>Data retrieved 2pm, Tue 6 Oct 2026 · Generated 8 Oct 2026, 9:35am · Sample data · Made with Python (python-pptx)</a:t>
+              <a:t>Data retrieved 2pm, Tue 6 Oct 2026 · Generated 9 Oct 2026, 8:41am · Sample data · Made with Python (python-pptx)</a:t>
             </a:r>
           </a:p>
         </p:txBody>
